--- a/docs/downloads/Day2/1530_hands-on_EN.pptx
+++ b/docs/downloads/Day2/1530_hands-on_EN.pptx
@@ -3244,45 +3244,6 @@
       </p:sp>
       <p:sp>
         <p:nvSpPr>
-          <p:cNvPr id="7" name="Text 5"/>
-          <p:cNvSpPr txBox="1"/>
-          <p:nvPr/>
-        </p:nvSpPr>
-        <p:spPr>
-          <a:xfrm>
-            <a:off x="548640" y="4526280"/>
-            <a:ext cx="6217920" cy="228600"/>
-          </a:xfrm>
-          <a:prstGeom prst="rect">
-            <a:avLst/>
-          </a:prstGeom>
-          <a:noFill/>
-          <a:ln/>
-        </p:spPr>
-        <p:txBody>
-          <a:bodyPr wrap="square" lIns="0" tIns="0" rIns="0" bIns="0" rtlCol="0" anchor="t"/>
-          <a:lstStyle/>
-          <a:p>
-            <a:pPr marL="0" indent="0">
-              <a:buNone/>
-            </a:pPr>
-            <a:r>
-              <a:rPr lang="en-US" sz="950" dirty="0">
-                <a:solidFill>
-                  <a:srgbClr val="E6F6EE"/>
-                </a:solidFill>
-                <a:latin typeface="Calibri" pitchFamily="34" charset="0"/>
-                <a:ea typeface="Calibri" pitchFamily="34" charset="-122"/>
-                <a:cs typeface="Calibri" pitchFamily="34" charset="-120"/>
-              </a:rPr>
-              <a:t>African Development Bank · African Union (STATAFRIC) · National Institute of Statistics of Rwanda</a:t>
-            </a:r>
-            <a:endParaRPr lang="en-US" sz="950" dirty="0"/>
-          </a:p>
-        </p:txBody>
-      </p:sp>
-      <p:sp>
-        <p:nvSpPr>
           <p:cNvPr id="8" name="Shape 6"/>
           <p:cNvSpPr/>
           <p:nvPr/>
@@ -4218,6 +4179,142 @@
               <a:t>Le Chat</a:t>
             </a:r>
             <a:endParaRPr lang="en-US" sz="1000" dirty="0"/>
+          </a:p>
+        </p:txBody>
+      </p:sp>
+      <p:sp>
+        <p:nvSpPr>
+          <p:cNvPr id="38" name="Text 23">
+            <a:extLst>
+              <a:ext uri="{FF2B5EF4-FFF2-40B4-BE49-F238E27FC236}">
+                <a16:creationId xmlns:a16="http://schemas.microsoft.com/office/drawing/2014/main" id="{63FA8B9D-DB68-579C-771A-9842BFB17FBA}"/>
+              </a:ext>
+            </a:extLst>
+          </p:cNvPr>
+          <p:cNvSpPr txBox="1"/>
+          <p:nvPr/>
+        </p:nvSpPr>
+        <p:spPr>
+          <a:xfrm>
+            <a:off x="548640" y="4521708"/>
+            <a:ext cx="6400800" cy="274320"/>
+          </a:xfrm>
+          <a:prstGeom prst="rect">
+            <a:avLst/>
+          </a:prstGeom>
+          <a:noFill/>
+          <a:ln/>
+        </p:spPr>
+        <p:txBody>
+          <a:bodyPr wrap="square" lIns="0" tIns="0" rIns="0" bIns="0" rtlCol="0" anchor="t"/>
+          <a:lstStyle>
+            <a:lvl1pPr marL="0" algn="l" defTabSz="914400" rtl="0" eaLnBrk="1" latinLnBrk="0" hangingPunct="1">
+              <a:defRPr sz="1800" kern="1200">
+                <a:solidFill>
+                  <a:schemeClr val="tx1"/>
+                </a:solidFill>
+                <a:latin typeface="+mn-lt"/>
+                <a:ea typeface="+mn-ea"/>
+                <a:cs typeface="+mn-cs"/>
+              </a:defRPr>
+            </a:lvl1pPr>
+            <a:lvl2pPr marL="457200" algn="l" defTabSz="914400" rtl="0" eaLnBrk="1" latinLnBrk="0" hangingPunct="1">
+              <a:defRPr sz="1800" kern="1200">
+                <a:solidFill>
+                  <a:schemeClr val="tx1"/>
+                </a:solidFill>
+                <a:latin typeface="+mn-lt"/>
+                <a:ea typeface="+mn-ea"/>
+                <a:cs typeface="+mn-cs"/>
+              </a:defRPr>
+            </a:lvl2pPr>
+            <a:lvl3pPr marL="914400" algn="l" defTabSz="914400" rtl="0" eaLnBrk="1" latinLnBrk="0" hangingPunct="1">
+              <a:defRPr sz="1800" kern="1200">
+                <a:solidFill>
+                  <a:schemeClr val="tx1"/>
+                </a:solidFill>
+                <a:latin typeface="+mn-lt"/>
+                <a:ea typeface="+mn-ea"/>
+                <a:cs typeface="+mn-cs"/>
+              </a:defRPr>
+            </a:lvl3pPr>
+            <a:lvl4pPr marL="1371600" algn="l" defTabSz="914400" rtl="0" eaLnBrk="1" latinLnBrk="0" hangingPunct="1">
+              <a:defRPr sz="1800" kern="1200">
+                <a:solidFill>
+                  <a:schemeClr val="tx1"/>
+                </a:solidFill>
+                <a:latin typeface="+mn-lt"/>
+                <a:ea typeface="+mn-ea"/>
+                <a:cs typeface="+mn-cs"/>
+              </a:defRPr>
+            </a:lvl4pPr>
+            <a:lvl5pPr marL="1828800" algn="l" defTabSz="914400" rtl="0" eaLnBrk="1" latinLnBrk="0" hangingPunct="1">
+              <a:defRPr sz="1800" kern="1200">
+                <a:solidFill>
+                  <a:schemeClr val="tx1"/>
+                </a:solidFill>
+                <a:latin typeface="+mn-lt"/>
+                <a:ea typeface="+mn-ea"/>
+                <a:cs typeface="+mn-cs"/>
+              </a:defRPr>
+            </a:lvl5pPr>
+            <a:lvl6pPr marL="2286000" algn="l" defTabSz="914400" rtl="0" eaLnBrk="1" latinLnBrk="0" hangingPunct="1">
+              <a:defRPr sz="1800" kern="1200">
+                <a:solidFill>
+                  <a:schemeClr val="tx1"/>
+                </a:solidFill>
+                <a:latin typeface="+mn-lt"/>
+                <a:ea typeface="+mn-ea"/>
+                <a:cs typeface="+mn-cs"/>
+              </a:defRPr>
+            </a:lvl6pPr>
+            <a:lvl7pPr marL="2743200" algn="l" defTabSz="914400" rtl="0" eaLnBrk="1" latinLnBrk="0" hangingPunct="1">
+              <a:defRPr sz="1800" kern="1200">
+                <a:solidFill>
+                  <a:schemeClr val="tx1"/>
+                </a:solidFill>
+                <a:latin typeface="+mn-lt"/>
+                <a:ea typeface="+mn-ea"/>
+                <a:cs typeface="+mn-cs"/>
+              </a:defRPr>
+            </a:lvl7pPr>
+            <a:lvl8pPr marL="3200400" algn="l" defTabSz="914400" rtl="0" eaLnBrk="1" latinLnBrk="0" hangingPunct="1">
+              <a:defRPr sz="1800" kern="1200">
+                <a:solidFill>
+                  <a:schemeClr val="tx1"/>
+                </a:solidFill>
+                <a:latin typeface="+mn-lt"/>
+                <a:ea typeface="+mn-ea"/>
+                <a:cs typeface="+mn-cs"/>
+              </a:defRPr>
+            </a:lvl8pPr>
+            <a:lvl9pPr marL="3657600" algn="l" defTabSz="914400" rtl="0" eaLnBrk="1" latinLnBrk="0" hangingPunct="1">
+              <a:defRPr sz="1800" kern="1200">
+                <a:solidFill>
+                  <a:schemeClr val="tx1"/>
+                </a:solidFill>
+                <a:latin typeface="+mn-lt"/>
+                <a:ea typeface="+mn-ea"/>
+                <a:cs typeface="+mn-cs"/>
+              </a:defRPr>
+            </a:lvl9pPr>
+          </a:lstStyle>
+          <a:p>
+            <a:pPr marL="0" indent="0">
+              <a:buNone/>
+            </a:pPr>
+            <a:r>
+              <a:rPr lang="en-US" sz="1200" dirty="0">
+                <a:solidFill>
+                  <a:srgbClr val="FFFFFF"/>
+                </a:solidFill>
+                <a:latin typeface="Calibri" pitchFamily="34" charset="0"/>
+                <a:ea typeface="Calibri" pitchFamily="34" charset="-122"/>
+                <a:cs typeface="Calibri" pitchFamily="34" charset="-120"/>
+              </a:rPr>
+              <a:t>Data Innovation For Africa (DI4A) - African Development Bank</a:t>
+            </a:r>
+            <a:endParaRPr lang="en-US" sz="1200" dirty="0"/>
           </a:p>
         </p:txBody>
       </p:sp>
